--- a/biotrain-2026/Demos/GWAS/GWAS_slides.pptx
+++ b/biotrain-2026/Demos/GWAS/GWAS_slides.pptx
@@ -5,14 +5,15 @@
     <p:sldMasterId id="2147483648" r:id="rId1"/>
   </p:sldMasterIdLst>
   <p:notesMasterIdLst>
-    <p:notesMasterId r:id="rId7"/>
+    <p:notesMasterId r:id="rId8"/>
   </p:notesMasterIdLst>
   <p:sldIdLst>
     <p:sldId id="256" r:id="rId2"/>
-    <p:sldId id="257" r:id="rId3"/>
-    <p:sldId id="259" r:id="rId4"/>
-    <p:sldId id="260" r:id="rId5"/>
-    <p:sldId id="261" r:id="rId6"/>
+    <p:sldId id="262" r:id="rId3"/>
+    <p:sldId id="257" r:id="rId4"/>
+    <p:sldId id="259" r:id="rId5"/>
+    <p:sldId id="260" r:id="rId6"/>
+    <p:sldId id="261" r:id="rId7"/>
   </p:sldIdLst>
   <p:sldSz cx="12192000" cy="6858000"/>
   <p:notesSz cx="6858000" cy="9144000"/>
@@ -528,7 +529,7 @@
           <a:p>
             <a:fld id="{68594AEA-6D64-7940-8BD3-8F88CBA96C9F}" type="slidenum">
               <a:rPr lang="en-US" smtClean="0"/>
-              <a:t>3</a:t>
+              <a:t>4</a:t>
             </a:fld>
             <a:endParaRPr lang="en-US"/>
           </a:p>
@@ -612,7 +613,7 @@
           <a:p>
             <a:fld id="{68594AEA-6D64-7940-8BD3-8F88CBA96C9F}" type="slidenum">
               <a:rPr lang="en-US" smtClean="0"/>
-              <a:t>5</a:t>
+              <a:t>6</a:t>
             </a:fld>
             <a:endParaRPr lang="en-US"/>
           </a:p>
@@ -3953,6 +3954,196 @@
       </p:grpSpPr>
       <p:sp>
         <p:nvSpPr>
+          <p:cNvPr id="2057" name="Rectangle 2056">
+            <a:extLst>
+              <a:ext uri="{FF2B5EF4-FFF2-40B4-BE49-F238E27FC236}">
+                <a16:creationId xmlns:a16="http://schemas.microsoft.com/office/drawing/2014/main" id="{A4AC5506-6312-4701-8D3C-40187889A947}"/>
+              </a:ext>
+              <a:ext uri="{C183D7F6-B498-43B3-948B-1728B52AA6E4}">
+                <adec:decorative xmlns:adec="http://schemas.microsoft.com/office/drawing/2017/decorative" val="1"/>
+              </a:ext>
+            </a:extLst>
+          </p:cNvPr>
+          <p:cNvSpPr>
+            <a:spLocks noGrp="1" noRot="1" noChangeAspect="1" noMove="1" noResize="1" noEditPoints="1" noAdjustHandles="1" noChangeArrowheads="1" noChangeShapeType="1" noTextEdit="1"/>
+          </p:cNvSpPr>
+          <p:nvPr>
+            <p:extLst>
+              <p:ext uri="{386F3935-93C4-4BCD-93E2-E3B085C9AB24}">
+                <p16:designElem xmlns:p16="http://schemas.microsoft.com/office/powerpoint/2015/main" val="1"/>
+              </p:ext>
+            </p:extLst>
+          </p:nvPr>
+        </p:nvSpPr>
+        <p:spPr>
+          <a:xfrm>
+            <a:off x="0" y="651752"/>
+            <a:ext cx="12192000" cy="736551"/>
+          </a:xfrm>
+          <a:prstGeom prst="rect">
+            <a:avLst/>
+          </a:prstGeom>
+          <a:solidFill>
+            <a:schemeClr val="tx1"/>
+          </a:solidFill>
+          <a:ln>
+            <a:noFill/>
+          </a:ln>
+        </p:spPr>
+        <p:style>
+          <a:lnRef idx="2">
+            <a:schemeClr val="accent1">
+              <a:shade val="50000"/>
+            </a:schemeClr>
+          </a:lnRef>
+          <a:fillRef idx="1">
+            <a:schemeClr val="accent1"/>
+          </a:fillRef>
+          <a:effectRef idx="0">
+            <a:schemeClr val="accent1"/>
+          </a:effectRef>
+          <a:fontRef idx="minor">
+            <a:schemeClr val="lt1"/>
+          </a:fontRef>
+        </p:style>
+        <p:txBody>
+          <a:bodyPr rtlCol="0" anchor="ctr"/>
+          <a:lstStyle/>
+          <a:p>
+            <a:pPr algn="ctr"/>
+            <a:endParaRPr lang="en-US"/>
+          </a:p>
+        </p:txBody>
+      </p:sp>
+      <p:sp>
+        <p:nvSpPr>
+          <p:cNvPr id="2" name="Title 1">
+            <a:extLst>
+              <a:ext uri="{FF2B5EF4-FFF2-40B4-BE49-F238E27FC236}">
+                <a16:creationId xmlns:a16="http://schemas.microsoft.com/office/drawing/2014/main" id="{AB00BBC1-406D-98B1-DA56-27DAA95BEB6C}"/>
+              </a:ext>
+            </a:extLst>
+          </p:cNvPr>
+          <p:cNvSpPr>
+            <a:spLocks noGrp="1"/>
+          </p:cNvSpPr>
+          <p:nvPr>
+            <p:ph type="title"/>
+          </p:nvPr>
+        </p:nvSpPr>
+        <p:spPr>
+          <a:xfrm>
+            <a:off x="556532" y="643467"/>
+            <a:ext cx="11210925" cy="744836"/>
+          </a:xfrm>
+        </p:spPr>
+        <p:txBody>
+          <a:bodyPr vert="horz" lIns="91440" tIns="45720" rIns="91440" bIns="45720" rtlCol="0" anchor="ctr">
+            <a:normAutofit/>
+          </a:bodyPr>
+          <a:lstStyle/>
+          <a:p>
+            <a:pPr algn="ctr"/>
+            <a:r>
+              <a:rPr lang="en-US" sz="3200" kern="1200" dirty="0">
+                <a:solidFill>
+                  <a:schemeClr val="bg1"/>
+                </a:solidFill>
+                <a:latin typeface="+mj-lt"/>
+                <a:ea typeface="+mj-ea"/>
+                <a:cs typeface="+mj-cs"/>
+              </a:rPr>
+              <a:t>Mendelian vs complex disorders</a:t>
+            </a:r>
+          </a:p>
+        </p:txBody>
+      </p:sp>
+      <p:pic>
+        <p:nvPicPr>
+          <p:cNvPr id="2052" name="Picture 4" descr="Figure 1.  Comparison between rare monogenic and more common polygenic eye diseases. The red arrow illustrates the impact of each genetic change on disease development, with a wider arrow representing a greater impact. Monogenic conditions are caused by single, high-impact genetic variants, whereas the development of polygenic diseases is influenced by the combined effect of multiple, lower-impact genetic changes. The green arrow shows the extent to which environmental factors influence disease development, with a wider arrow representing a greater impact. Lifestyle, diet, and age can significantly influence disease risk in polygenic conditions, compared to the minimal environmental influence on monogenic diseases. Genetic testing for monogenic diseases looks for the presence of pathogenic (disease-causing) variants. In contrast, polygenic risk scores are derived from the cumulative effects of multiple single nucleotide polymorphisms to assess the risk of polygenic conditions. In the general population, pathogenic variants causing monogenic diseases are rare, while single nucleotide polymorphisms for polygenic diseases are common. Some icons within the figure were created with Biorender.com.">
+            <a:extLst>
+              <a:ext uri="{FF2B5EF4-FFF2-40B4-BE49-F238E27FC236}">
+                <a16:creationId xmlns:a16="http://schemas.microsoft.com/office/drawing/2014/main" id="{4B732F55-73A3-1115-1EFB-A60ED3DB31B1}"/>
+              </a:ext>
+            </a:extLst>
+          </p:cNvPr>
+          <p:cNvPicPr>
+            <a:picLocks noChangeAspect="1" noChangeArrowheads="1"/>
+          </p:cNvPicPr>
+          <p:nvPr/>
+        </p:nvPicPr>
+        <p:blipFill>
+          <a:blip r:embed="rId2">
+            <a:extLst>
+              <a:ext uri="{28A0092B-C50C-407E-A947-70E740481C1C}">
+                <a14:useLocalDpi xmlns:a14="http://schemas.microsoft.com/office/drawing/2010/main" val="0"/>
+              </a:ext>
+            </a:extLst>
+          </a:blip>
+          <a:stretch>
+            <a:fillRect/>
+          </a:stretch>
+        </p:blipFill>
+        <p:spPr bwMode="auto">
+          <a:xfrm>
+            <a:off x="1950529" y="1675227"/>
+            <a:ext cx="8290941" cy="4394199"/>
+          </a:xfrm>
+          <a:prstGeom prst="rect">
+            <a:avLst/>
+          </a:prstGeom>
+          <a:noFill/>
+          <a:extLst>
+            <a:ext uri="{909E8E84-426E-40DD-AFC4-6F175D3DCCD1}">
+              <a14:hiddenFill xmlns:a14="http://schemas.microsoft.com/office/drawing/2010/main">
+                <a:solidFill>
+                  <a:srgbClr val="FFFFFF"/>
+                </a:solidFill>
+              </a14:hiddenFill>
+            </a:ext>
+          </a:extLst>
+        </p:spPr>
+      </p:pic>
+    </p:spTree>
+    <p:extLst>
+      <p:ext uri="{BB962C8B-B14F-4D97-AF65-F5344CB8AC3E}">
+        <p14:creationId xmlns:p14="http://schemas.microsoft.com/office/powerpoint/2010/main" val="901273376"/>
+      </p:ext>
+    </p:extLst>
+  </p:cSld>
+  <p:clrMapOvr>
+    <a:masterClrMapping/>
+  </p:clrMapOvr>
+</p:sld>
+</file>
+
+<file path=ppt/slides/slide3.xml><?xml version="1.0" encoding="utf-8"?>
+<p:sld xmlns:a="http://schemas.openxmlformats.org/drawingml/2006/main" xmlns:r="http://schemas.openxmlformats.org/officeDocument/2006/relationships" xmlns:p="http://schemas.openxmlformats.org/presentationml/2006/main">
+  <p:cSld>
+    <p:bg>
+      <p:bgPr>
+        <a:solidFill>
+          <a:schemeClr val="bg1"/>
+        </a:solidFill>
+        <a:effectLst/>
+      </p:bgPr>
+    </p:bg>
+    <p:spTree>
+      <p:nvGrpSpPr>
+        <p:cNvPr id="1" name=""/>
+        <p:cNvGrpSpPr/>
+        <p:nvPr/>
+      </p:nvGrpSpPr>
+      <p:grpSpPr>
+        <a:xfrm>
+          <a:off x="0" y="0"/>
+          <a:ext cx="0" cy="0"/>
+          <a:chOff x="0" y="0"/>
+          <a:chExt cx="0" cy="0"/>
+        </a:xfrm>
+      </p:grpSpPr>
+      <p:sp>
+        <p:nvSpPr>
           <p:cNvPr id="10" name="Rectangle 9">
             <a:extLst>
               <a:ext uri="{FF2B5EF4-FFF2-40B4-BE49-F238E27FC236}">
@@ -4211,7 +4402,7 @@
 </p:sld>
 </file>
 
-<file path=ppt/slides/slide3.xml><?xml version="1.0" encoding="utf-8"?>
+<file path=ppt/slides/slide4.xml><?xml version="1.0" encoding="utf-8"?>
 <p:sld xmlns:a="http://schemas.openxmlformats.org/drawingml/2006/main" xmlns:r="http://schemas.openxmlformats.org/officeDocument/2006/relationships" xmlns:p="http://schemas.openxmlformats.org/presentationml/2006/main">
   <p:cSld>
     <p:bg>
@@ -4554,7 +4745,7 @@
 </p:sld>
 </file>
 
-<file path=ppt/slides/slide4.xml><?xml version="1.0" encoding="utf-8"?>
+<file path=ppt/slides/slide5.xml><?xml version="1.0" encoding="utf-8"?>
 <p:sld xmlns:a="http://schemas.openxmlformats.org/drawingml/2006/main" xmlns:r="http://schemas.openxmlformats.org/officeDocument/2006/relationships" xmlns:p="http://schemas.openxmlformats.org/presentationml/2006/main">
   <p:cSld>
     <p:bg>
@@ -5106,7 +5297,7 @@
 </p:sld>
 </file>
 
-<file path=ppt/slides/slide5.xml><?xml version="1.0" encoding="utf-8"?>
+<file path=ppt/slides/slide6.xml><?xml version="1.0" encoding="utf-8"?>
 <p:sld xmlns:a="http://schemas.openxmlformats.org/drawingml/2006/main" xmlns:r="http://schemas.openxmlformats.org/officeDocument/2006/relationships" xmlns:p="http://schemas.openxmlformats.org/presentationml/2006/main">
   <p:cSld>
     <p:bg>

--- a/biotrain-2026/Demos/GWAS/GWAS_slides.pptx
+++ b/biotrain-2026/Demos/GWAS/GWAS_slides.pptx
@@ -3892,23 +3892,25 @@
         </p:nvSpPr>
         <p:spPr/>
         <p:txBody>
-          <a:bodyPr/>
-          <a:lstStyle/>
-          <a:p>
-            <a:r>
-              <a:rPr lang="en-US" dirty="0"/>
+          <a:bodyPr>
+            <a:normAutofit/>
+          </a:bodyPr>
+          <a:lstStyle/>
+          <a:p>
+            <a:r>
+              <a:rPr lang="en-US" sz="2000" dirty="0"/>
               <a:t>Ashlyn Anderson</a:t>
             </a:r>
           </a:p>
           <a:p>
             <a:r>
-              <a:rPr lang="en-US" dirty="0"/>
+              <a:rPr lang="en-US" sz="2000" dirty="0"/>
               <a:t>PhD Candidate, Cochran lab</a:t>
             </a:r>
           </a:p>
           <a:p>
             <a:r>
-              <a:rPr lang="en-US" dirty="0"/>
+              <a:rPr lang="en-US" sz="2000" dirty="0"/>
               <a:t>5/28/26</a:t>
             </a:r>
           </a:p>
